--- a/docs/second-voice-deck.pptx
+++ b/docs/second-voice-deck.pptx
@@ -11543,7 +11543,7 @@
                 </a:solidFill>
                 <a:latin typeface="Arial"/>
               </a:rPr>
-              <a:t>Demo video link: to be added after upload</a:t>
+              <a:t>https://youtu.be/sW3pTCYTcHA</a:t>
             </a:r>
           </a:p>
         </p:txBody>
